--- a/task156/golden/council_pool_request_2027.pptx
+++ b/task156/golden/council_pool_request_2027.pptx
@@ -3120,7 +3120,7 @@
               </a:defRPr>
             </a:pPr>
             <a:r>
-              <a:t>Request 35 paid moderator FTE for 2027</a:t>
+              <a:t>Request 32 paid moderator FTE for 2027</a:t>
             </a:r>
           </a:p>
           <a:p>
@@ -3136,7 +3136,7 @@
               </a:defRPr>
             </a:pPr>
             <a:r>
-              <a:t>9 FTE above finance's 2027 envelope of 26 FTE (27 FTE funded for 2026)</a:t>
+              <a:t>6 FTE above finance's 2027 envelope of 26 FTE (27 FTE funded for 2026)</a:t>
             </a:r>
           </a:p>
         </p:txBody>
@@ -3352,7 +3352,7 @@
                         </a:defRPr>
                       </a:pPr>
                       <a:r>
-                        <a:t>7</a:t>
+                        <a:t>6</a:t>
                       </a:r>
                     </a:p>
                   </a:txBody>
@@ -3402,7 +3402,7 @@
                         </a:defRPr>
                       </a:pPr>
                       <a:r>
-                        <a:t>5</a:t>
+                        <a:t>4</a:t>
                       </a:r>
                     </a:p>
                   </a:txBody>
@@ -3452,7 +3452,7 @@
                         </a:defRPr>
                       </a:pPr>
                       <a:r>
-                        <a:t>5</a:t>
+                        <a:t>4</a:t>
                       </a:r>
                     </a:p>
                   </a:txBody>
@@ -3702,7 +3702,7 @@
                         </a:defRPr>
                       </a:pPr>
                       <a:r>
-                        <a:t>35</a:t>
+                        <a:t>32</a:t>
                       </a:r>
                     </a:p>
                   </a:txBody>
@@ -3780,7 +3780,7 @@
               </a:defRPr>
             </a:pPr>
             <a:r>
-              <a:t>Each site's pool loses about 2 per cent of its reviewers a month, and almost no member has been granted review access since late 2024 (2,871 new reviewers in 2024, 70 since).</a:t>
+              <a:t>Review access has been by invitation only since 1 September 2026, so the pools only shrink. The newest reviewers leave fastest (about 9 per cent a month in their first year, under one per cent from their fourth): the 10,607 reviewers active in September 2026 average about 8,800 a month in 2027.</a:t>
             </a:r>
           </a:p>
           <a:p>
@@ -3812,7 +3812,7 @@
               </a:defRPr>
             </a:pPr>
             <a:r>
-              <a:t>Priced at the 2027 standards (close votes at 2.0 minutes, down from 5.0), the nine sites need 35 FTE.</a:t>
+              <a:t>Priced at the 2027 standards (close votes at 2.0 minutes, down from 5.0), the nine sites need 32 FTE.</a:t>
             </a:r>
           </a:p>
         </p:txBody>
@@ -3974,7 +3974,7 @@
               </a:defRPr>
             </a:pPr>
             <a:r>
-              <a:t>2027 needs 35 FTE of paid review hours against an envelope of 26</a:t>
+              <a:t>2027 needs 32 FTE of paid review hours against an envelope of 26</a:t>
             </a:r>
           </a:p>
           <a:p>
